--- a/Kanta/kyrie/Ikaw Nga Gipadala.pptx
+++ b/Kanta/kyrie/Ikaw Nga Gipadala.pptx
@@ -204,7 +204,7 @@
           <a:p>
             <a:fld id="{2E860BF0-D007-460F-BF20-9BF0E803D277}" type="datetimeFigureOut">
               <a:rPr lang="en-US" smtClean="0"/>
-              <a:t>1/24/2025</a:t>
+              <a:t>2/28/2026</a:t>
             </a:fld>
             <a:endParaRPr lang="en-US"/>
           </a:p>
@@ -618,7 +618,7 @@
           <a:p>
             <a:fld id="{689CB065-93CC-4F93-97CB-5160E2F98F73}" type="datetimeFigureOut">
               <a:rPr lang="en-US" smtClean="0"/>
-              <a:t>1/24/2025</a:t>
+              <a:t>2/28/2026</a:t>
             </a:fld>
             <a:endParaRPr lang="en-US"/>
           </a:p>
@@ -816,7 +816,7 @@
           <a:p>
             <a:fld id="{689CB065-93CC-4F93-97CB-5160E2F98F73}" type="datetimeFigureOut">
               <a:rPr lang="en-US" smtClean="0"/>
-              <a:t>1/24/2025</a:t>
+              <a:t>2/28/2026</a:t>
             </a:fld>
             <a:endParaRPr lang="en-US"/>
           </a:p>
@@ -1024,7 +1024,7 @@
           <a:p>
             <a:fld id="{689CB065-93CC-4F93-97CB-5160E2F98F73}" type="datetimeFigureOut">
               <a:rPr lang="en-US" smtClean="0"/>
-              <a:t>1/24/2025</a:t>
+              <a:t>2/28/2026</a:t>
             </a:fld>
             <a:endParaRPr lang="en-US"/>
           </a:p>
@@ -1222,7 +1222,7 @@
           <a:p>
             <a:fld id="{689CB065-93CC-4F93-97CB-5160E2F98F73}" type="datetimeFigureOut">
               <a:rPr lang="en-US" smtClean="0"/>
-              <a:t>1/24/2025</a:t>
+              <a:t>2/28/2026</a:t>
             </a:fld>
             <a:endParaRPr lang="en-US"/>
           </a:p>
@@ -1497,7 +1497,7 @@
           <a:p>
             <a:fld id="{689CB065-93CC-4F93-97CB-5160E2F98F73}" type="datetimeFigureOut">
               <a:rPr lang="en-US" smtClean="0"/>
-              <a:t>1/24/2025</a:t>
+              <a:t>2/28/2026</a:t>
             </a:fld>
             <a:endParaRPr lang="en-US"/>
           </a:p>
@@ -1762,7 +1762,7 @@
           <a:p>
             <a:fld id="{689CB065-93CC-4F93-97CB-5160E2F98F73}" type="datetimeFigureOut">
               <a:rPr lang="en-US" smtClean="0"/>
-              <a:t>1/24/2025</a:t>
+              <a:t>2/28/2026</a:t>
             </a:fld>
             <a:endParaRPr lang="en-US"/>
           </a:p>
@@ -2174,7 +2174,7 @@
           <a:p>
             <a:fld id="{689CB065-93CC-4F93-97CB-5160E2F98F73}" type="datetimeFigureOut">
               <a:rPr lang="en-US" smtClean="0"/>
-              <a:t>1/24/2025</a:t>
+              <a:t>2/28/2026</a:t>
             </a:fld>
             <a:endParaRPr lang="en-US"/>
           </a:p>
@@ -2315,7 +2315,7 @@
           <a:p>
             <a:fld id="{689CB065-93CC-4F93-97CB-5160E2F98F73}" type="datetimeFigureOut">
               <a:rPr lang="en-US" smtClean="0"/>
-              <a:t>1/24/2025</a:t>
+              <a:t>2/28/2026</a:t>
             </a:fld>
             <a:endParaRPr lang="en-US"/>
           </a:p>
@@ -2428,7 +2428,7 @@
           <a:p>
             <a:fld id="{689CB065-93CC-4F93-97CB-5160E2F98F73}" type="datetimeFigureOut">
               <a:rPr lang="en-US" smtClean="0"/>
-              <a:t>1/24/2025</a:t>
+              <a:t>2/28/2026</a:t>
             </a:fld>
             <a:endParaRPr lang="en-US"/>
           </a:p>
@@ -2739,7 +2739,7 @@
           <a:p>
             <a:fld id="{689CB065-93CC-4F93-97CB-5160E2F98F73}" type="datetimeFigureOut">
               <a:rPr lang="en-US" smtClean="0"/>
-              <a:t>1/24/2025</a:t>
+              <a:t>2/28/2026</a:t>
             </a:fld>
             <a:endParaRPr lang="en-US"/>
           </a:p>
@@ -3027,7 +3027,7 @@
           <a:p>
             <a:fld id="{689CB065-93CC-4F93-97CB-5160E2F98F73}" type="datetimeFigureOut">
               <a:rPr lang="en-US" smtClean="0"/>
-              <a:t>1/24/2025</a:t>
+              <a:t>2/28/2026</a:t>
             </a:fld>
             <a:endParaRPr lang="en-US"/>
           </a:p>
@@ -3271,7 +3271,7 @@
           <a:p>
             <a:fld id="{689CB065-93CC-4F93-97CB-5160E2F98F73}" type="datetimeFigureOut">
               <a:rPr lang="en-US" smtClean="0"/>
-              <a:t>1/24/2025</a:t>
+              <a:t>2/28/2026</a:t>
             </a:fld>
             <a:endParaRPr lang="en-US"/>
           </a:p>
@@ -4227,7 +4227,27 @@
                 <a:latin typeface="Times New Roman" panose="02020603050405020304" pitchFamily="18" charset="0"/>
                 <a:cs typeface="Times New Roman" panose="02020603050405020304" pitchFamily="18" charset="0"/>
               </a:rPr>
-              <a:t>Arun Pagpangama Alang Kanimo</a:t>
+              <a:t>Arun Pagpangama Alang Kan</a:t>
+            </a:r>
+            <a:r>
+              <a:rPr lang="en-US" sz="11500">
+                <a:solidFill>
+                  <a:schemeClr val="bg1"/>
+                </a:solidFill>
+                <a:latin typeface="Times New Roman" panose="02020603050405020304" pitchFamily="18" charset="0"/>
+                <a:cs typeface="Times New Roman" panose="02020603050405020304" pitchFamily="18" charset="0"/>
+              </a:rPr>
+              <a:t>a</a:t>
+            </a:r>
+            <a:r>
+              <a:rPr lang="pl-PL" sz="11500">
+                <a:solidFill>
+                  <a:schemeClr val="bg1"/>
+                </a:solidFill>
+                <a:latin typeface="Times New Roman" panose="02020603050405020304" pitchFamily="18" charset="0"/>
+                <a:cs typeface="Times New Roman" panose="02020603050405020304" pitchFamily="18" charset="0"/>
+              </a:rPr>
+              <a:t>mo</a:t>
             </a:r>
             <a:endParaRPr lang="en-US" sz="11500" dirty="0">
               <a:solidFill>
